--- a/dist/초1/사회·역사/가족과생활/초1_사회·역사_가족과생활_01_가족의생활.pptx
+++ b/dist/초1/사회·역사/가족과생활/초1_사회·역사_가족과생활_01_가족의생활.pptx
@@ -121,13 +121,13 @@
   <p:extLst>
     <p:ext uri="{521415D9-36F7-43E2-AB2F-B90AF26B5E84}">
       <p14:sectionLst xmlns:p14="http://schemas.microsoft.com/office/powerpoint/2010/main">
-        <p14:section name="도입" id="{a0e6da14-0ba3-9288-a8ba-63caf9c774d6}">
+        <p14:section name="도입" id="{f6d804a0-2d1a-e965-d09b-7898447a545b}">
           <p14:sldIdLst>
             <p14:sldId id="256"/>
             <p14:sldId id="257"/>
           </p14:sldIdLst>
         </p14:section>
-        <p14:section name="개념" id="{aaf67ac1-edcf-030a-e61a-06957df65c4a}">
+        <p14:section name="개념" id="{81d995b2-22f2-8459-697d-c4b7479eb117}">
           <p14:sldIdLst>
             <p14:sldId id="258"/>
             <p14:sldId id="259"/>
@@ -135,20 +135,20 @@
             <p14:sldId id="262"/>
           </p14:sldIdLst>
         </p14:section>
-        <p14:section name="연습" id="{971c6f08-b3b0-4be8-1536-83afbad93047}">
+        <p14:section name="연습" id="{a4c4248b-26ce-9402-fb46-9c3fb4a66b63}">
           <p14:sldIdLst>
             <p14:sldId id="260"/>
             <p14:sldId id="263"/>
             <p14:sldId id="264"/>
           </p14:sldIdLst>
         </p14:section>
-        <p14:section name="개념" id="{682a3304-7b9e-7928-2fea-3f43c4996ef8}">
+        <p14:section name="개념" id="{e16fc23e-2d2c-4dfb-ddc6-d7f6f6190a75}">
           <p14:sldIdLst/>
         </p14:section>
-        <p14:section name="연습" id="{1c5eb476-a4cc-6465-093f-06dc4acf6c61}">
+        <p14:section name="연습" id="{1d78ed59-9ebf-c456-96c2-cd50a840322d}">
           <p14:sldIdLst/>
         </p14:section>
-        <p14:section name="확인" id="{0d6049a6-298e-d7d3-338e-efcd623dcd20}">
+        <p14:section name="확인" id="{c1f60227-20e6-398a-6b2b-8cd9d9e3a742}">
           <p14:sldIdLst>
             <p14:sldId id="265"/>
             <p14:sldId id="266"/>
@@ -156,12 +156,12 @@
             <p14:sldId id="268"/>
           </p14:sldIdLst>
         </p14:section>
-        <p14:section name="정리" id="{46a0ad16-7ab8-7db5-8678-28920d89be95}">
+        <p14:section name="정리" id="{bb30cfed-3121-92f4-6dd6-b9984ca9b7d4}">
           <p14:sldIdLst>
             <p14:sldId id="269"/>
           </p14:sldIdLst>
         </p14:section>
-        <p14:section name="보충" id="{f6a2bd93-efb6-3b72-166d-2a4d8e8d8968}">
+        <p14:section name="보충" id="{b340ea5f-5c9e-c30f-c61f-478114123b7d}">
           <p14:sldIdLst>
             <p14:sldId id="270"/>
           </p14:sldIdLst>
